--- a/presentation/fitcarnet-construire-avec-ia.pptx
+++ b/presentation/fitcarnet-construire-avec-ia.pptx
@@ -5019,7 +5019,7 @@
                 <a:ea typeface="Inter" pitchFamily="34" charset="-122"/>
                 <a:cs typeface="Inter" pitchFamily="34" charset="-120"/>
               </a:rPr>
-              <a:t>Multi-comptes · auto-hébergée sur mon NAS · web + Android · utilisée au quotidien</a:t>
+              <a:t>Un besoin réel : je m’en sers tous les jours — ce qui s’affiche est pesé, puis mangé.</a:t>
             </a:r>
             <a:endParaRPr lang="en-US" sz="1350" dirty="0"/>
           </a:p>
@@ -5207,8 +5207,8 @@
         </p:nvSpPr>
         <p:spPr>
           <a:xfrm>
-            <a:off x="548640" y="914400"/>
-            <a:ext cx="4754880" cy="1371600"/>
+            <a:off x="548640" y="822960"/>
+            <a:ext cx="4754880" cy="1280160"/>
           </a:xfrm>
           <a:prstGeom prst="rect">
             <a:avLst/>
@@ -5246,8 +5246,8 @@
         </p:nvSpPr>
         <p:spPr>
           <a:xfrm>
-            <a:off x="5669280" y="914400"/>
-            <a:ext cx="5943600" cy="1371600"/>
+            <a:off x="5669280" y="822960"/>
+            <a:ext cx="5943600" cy="1280160"/>
           </a:xfrm>
           <a:prstGeom prst="rect">
             <a:avLst/>
@@ -5288,12 +5288,12 @@
         </p:nvSpPr>
         <p:spPr>
           <a:xfrm>
-            <a:off x="548640" y="2606040"/>
-            <a:ext cx="5410048" cy="1554480"/>
+            <a:off x="548640" y="2286000"/>
+            <a:ext cx="5410048" cy="1508760"/>
           </a:xfrm>
           <a:prstGeom prst="roundRect">
             <a:avLst>
-              <a:gd name="adj" fmla="val 7059"/>
+              <a:gd name="adj" fmla="val 7273"/>
             </a:avLst>
           </a:prstGeom>
           <a:solidFill>
@@ -5315,7 +5315,7 @@
         </p:nvSpPr>
         <p:spPr>
           <a:xfrm>
-            <a:off x="777240" y="2834640"/>
+            <a:off x="777240" y="2514600"/>
             <a:ext cx="457200" cy="457200"/>
           </a:xfrm>
           <a:prstGeom prst="roundRect">
@@ -5350,7 +5350,7 @@
         </p:blipFill>
         <p:spPr>
           <a:xfrm>
-            <a:off x="877824" y="2935224"/>
+            <a:off x="877824" y="2615184"/>
             <a:ext cx="256032" cy="256032"/>
           </a:xfrm>
           <a:prstGeom prst="rect">
@@ -5366,7 +5366,7 @@
         </p:nvSpPr>
         <p:spPr>
           <a:xfrm>
-            <a:off x="1371600" y="2834640"/>
+            <a:off x="1371600" y="2514600"/>
             <a:ext cx="4404208" cy="457200"/>
           </a:xfrm>
           <a:prstGeom prst="rect">
@@ -5405,8 +5405,8 @@
         </p:nvSpPr>
         <p:spPr>
           <a:xfrm>
-            <a:off x="777240" y="3429000"/>
-            <a:ext cx="4952848" cy="594360"/>
+            <a:off x="777240" y="3108960"/>
+            <a:ext cx="4952848" cy="548640"/>
           </a:xfrm>
           <a:prstGeom prst="rect">
             <a:avLst/>
@@ -5444,12 +5444,12 @@
         </p:nvSpPr>
         <p:spPr>
           <a:xfrm>
-            <a:off x="6233008" y="2606040"/>
-            <a:ext cx="5410048" cy="1554480"/>
+            <a:off x="6233008" y="2286000"/>
+            <a:ext cx="5410048" cy="1508760"/>
           </a:xfrm>
           <a:prstGeom prst="roundRect">
             <a:avLst>
-              <a:gd name="adj" fmla="val 7059"/>
+              <a:gd name="adj" fmla="val 7273"/>
             </a:avLst>
           </a:prstGeom>
           <a:solidFill>
@@ -5471,7 +5471,7 @@
         </p:nvSpPr>
         <p:spPr>
           <a:xfrm>
-            <a:off x="6461608" y="2834640"/>
+            <a:off x="6461608" y="2514600"/>
             <a:ext cx="457200" cy="457200"/>
           </a:xfrm>
           <a:prstGeom prst="roundRect">
@@ -5506,7 +5506,7 @@
         </p:blipFill>
         <p:spPr>
           <a:xfrm>
-            <a:off x="6562192" y="2935224"/>
+            <a:off x="6562192" y="2615184"/>
             <a:ext cx="256032" cy="256032"/>
           </a:xfrm>
           <a:prstGeom prst="rect">
@@ -5522,7 +5522,7 @@
         </p:nvSpPr>
         <p:spPr>
           <a:xfrm>
-            <a:off x="7055968" y="2834640"/>
+            <a:off x="7055968" y="2514600"/>
             <a:ext cx="4404208" cy="457200"/>
           </a:xfrm>
           <a:prstGeom prst="rect">
@@ -5561,8 +5561,8 @@
         </p:nvSpPr>
         <p:spPr>
           <a:xfrm>
-            <a:off x="6461608" y="3429000"/>
-            <a:ext cx="4952848" cy="594360"/>
+            <a:off x="6461608" y="3108960"/>
+            <a:ext cx="4952848" cy="548640"/>
           </a:xfrm>
           <a:prstGeom prst="rect">
             <a:avLst/>
@@ -5600,12 +5600,12 @@
         </p:nvSpPr>
         <p:spPr>
           <a:xfrm>
-            <a:off x="548640" y="4389120"/>
-            <a:ext cx="5410048" cy="1554480"/>
+            <a:off x="548640" y="3977640"/>
+            <a:ext cx="5410048" cy="1508760"/>
           </a:xfrm>
           <a:prstGeom prst="roundRect">
             <a:avLst>
-              <a:gd name="adj" fmla="val 7059"/>
+              <a:gd name="adj" fmla="val 7273"/>
             </a:avLst>
           </a:prstGeom>
           <a:solidFill>
@@ -5627,7 +5627,7 @@
         </p:nvSpPr>
         <p:spPr>
           <a:xfrm>
-            <a:off x="777240" y="4617720"/>
+            <a:off x="777240" y="4206240"/>
             <a:ext cx="457200" cy="457200"/>
           </a:xfrm>
           <a:prstGeom prst="roundRect">
@@ -5662,7 +5662,7 @@
         </p:blipFill>
         <p:spPr>
           <a:xfrm>
-            <a:off x="877824" y="4718304"/>
+            <a:off x="877824" y="4306824"/>
             <a:ext cx="256032" cy="256032"/>
           </a:xfrm>
           <a:prstGeom prst="rect">
@@ -5678,7 +5678,7 @@
         </p:nvSpPr>
         <p:spPr>
           <a:xfrm>
-            <a:off x="1371600" y="4617720"/>
+            <a:off x="1371600" y="4206240"/>
             <a:ext cx="4404208" cy="457200"/>
           </a:xfrm>
           <a:prstGeom prst="rect">
@@ -5717,8 +5717,8 @@
         </p:nvSpPr>
         <p:spPr>
           <a:xfrm>
-            <a:off x="777240" y="5212080"/>
-            <a:ext cx="4952848" cy="594360"/>
+            <a:off x="777240" y="4800600"/>
+            <a:ext cx="4952848" cy="548640"/>
           </a:xfrm>
           <a:prstGeom prst="rect">
             <a:avLst/>
@@ -5756,12 +5756,12 @@
         </p:nvSpPr>
         <p:spPr>
           <a:xfrm>
-            <a:off x="6233008" y="4389120"/>
-            <a:ext cx="5410048" cy="1554480"/>
+            <a:off x="6233008" y="3977640"/>
+            <a:ext cx="5410048" cy="1508760"/>
           </a:xfrm>
           <a:prstGeom prst="roundRect">
             <a:avLst>
-              <a:gd name="adj" fmla="val 7059"/>
+              <a:gd name="adj" fmla="val 7273"/>
             </a:avLst>
           </a:prstGeom>
           <a:solidFill>
@@ -5783,7 +5783,7 @@
         </p:nvSpPr>
         <p:spPr>
           <a:xfrm>
-            <a:off x="6461608" y="4617720"/>
+            <a:off x="6461608" y="4206240"/>
             <a:ext cx="457200" cy="457200"/>
           </a:xfrm>
           <a:prstGeom prst="roundRect">
@@ -5818,7 +5818,7 @@
         </p:blipFill>
         <p:spPr>
           <a:xfrm>
-            <a:off x="6562192" y="4718304"/>
+            <a:off x="6562192" y="4306824"/>
             <a:ext cx="256032" cy="256032"/>
           </a:xfrm>
           <a:prstGeom prst="rect">
@@ -5834,7 +5834,7 @@
         </p:nvSpPr>
         <p:spPr>
           <a:xfrm>
-            <a:off x="7055968" y="4617720"/>
+            <a:off x="7055968" y="4206240"/>
             <a:ext cx="4404208" cy="457200"/>
           </a:xfrm>
           <a:prstGeom prst="rect">
@@ -5873,8 +5873,8 @@
         </p:nvSpPr>
         <p:spPr>
           <a:xfrm>
-            <a:off x="6461608" y="5212080"/>
-            <a:ext cx="4952848" cy="594360"/>
+            <a:off x="6461608" y="4800600"/>
+            <a:ext cx="4952848" cy="548640"/>
           </a:xfrm>
           <a:prstGeom prst="rect">
             <a:avLst/>
@@ -5899,6 +5899,96 @@
                 <a:cs typeface="Inter" pitchFamily="34" charset="-120"/>
               </a:rPr>
               <a:t>Ex. « Un chiffre faux est pire qu’un refus de répondre »</a:t>
+            </a:r>
+            <a:endParaRPr lang="en-US" sz="1350" dirty="0"/>
+          </a:p>
+        </p:txBody>
+      </p:sp>
+      <p:sp>
+        <p:nvSpPr>
+          <p:cNvPr id="28" name="Shape 22"/>
+          <p:cNvSpPr/>
+          <p:nvPr/>
+        </p:nvSpPr>
+        <p:spPr>
+          <a:xfrm>
+            <a:off x="548640" y="5806440"/>
+            <a:ext cx="11094415" cy="566928"/>
+          </a:xfrm>
+          <a:prstGeom prst="roundRect">
+            <a:avLst>
+              <a:gd name="adj" fmla="val 19355"/>
+            </a:avLst>
+          </a:prstGeom>
+          <a:solidFill>
+            <a:srgbClr val="23272E"/>
+          </a:solidFill>
+          <a:ln w="9525">
+            <a:solidFill>
+              <a:srgbClr val="2F343D"/>
+            </a:solidFill>
+            <a:prstDash val="solid"/>
+          </a:ln>
+        </p:spPr>
+      </p:sp>
+      <p:pic>
+        <p:nvPicPr>
+          <p:cNvPr id="29" name="Image 4" descr="preencoded.png">    </p:cNvPr>
+          <p:cNvPicPr>
+            <a:picLocks noChangeAspect="1"/>
+          </p:cNvPicPr>
+          <p:nvPr/>
+        </p:nvPicPr>
+        <p:blipFill>
+          <a:blip r:embed="rId5"/>
+          <a:stretch>
+            <a:fillRect/>
+          </a:stretch>
+        </p:blipFill>
+        <p:spPr>
+          <a:xfrm>
+            <a:off x="777240" y="5961888"/>
+            <a:ext cx="256032" cy="256032"/>
+          </a:xfrm>
+          <a:prstGeom prst="rect">
+            <a:avLst/>
+          </a:prstGeom>
+        </p:spPr>
+      </p:pic>
+      <p:sp>
+        <p:nvSpPr>
+          <p:cNvPr id="30" name="Text 23"/>
+          <p:cNvSpPr txBox="1"/>
+          <p:nvPr/>
+        </p:nvSpPr>
+        <p:spPr>
+          <a:xfrm>
+            <a:off x="1188720" y="5806440"/>
+            <a:ext cx="10225735" cy="566928"/>
+          </a:xfrm>
+          <a:prstGeom prst="rect">
+            <a:avLst/>
+          </a:prstGeom>
+          <a:noFill/>
+          <a:ln/>
+        </p:spPr>
+        <p:txBody>
+          <a:bodyPr wrap="square" lIns="0" tIns="0" rIns="0" bIns="0" rtlCol="0" anchor="ctr"/>
+          <a:lstStyle/>
+          <a:p>
+            <a:pPr indent="0" marL="0">
+              <a:buNone/>
+            </a:pPr>
+            <a:r>
+              <a:rPr lang="en-US" sz="1350" b="1" dirty="0">
+                <a:solidFill>
+                  <a:srgbClr val="E8EAED"/>
+                </a:solidFill>
+                <a:latin typeface="Inter" pitchFamily="34" charset="0"/>
+                <a:ea typeface="Inter" pitchFamily="34" charset="-122"/>
+                <a:cs typeface="Inter" pitchFamily="34" charset="-120"/>
+              </a:rPr>
+              <a:t>L’application : multi-comptes · auto-hébergée sur mon NAS · web + Android</a:t>
             </a:r>
             <a:endParaRPr lang="en-US" sz="1350" dirty="0"/>
           </a:p>
